--- a/materials/PMM-M1/PMM-M1-S1-Constructive-Alignment/PMM-M1-S1-Constructive-Alignment-slides.pptx
+++ b/materials/PMM-M1/PMM-M1-S1-Constructive-Alignment/PMM-M1-S1-Constructive-Alignment-slides.pptx
@@ -4936,7 +4936,7 @@
             </a:pPr>
             <a:r>
               <a:rPr/>
-              <a:t>22/02/2026</a:t>
+              <a:t>01/03/2026</a:t>
             </a:r>
           </a:p>
         </p:txBody>

--- a/materials/PMM-M1/PMM-M1-S1-Constructive-Alignment/PMM-M1-S1-Constructive-Alignment-slides.pptx
+++ b/materials/PMM-M1/PMM-M1-S1-Constructive-Alignment/PMM-M1-S1-Constructive-Alignment-slides.pptx
@@ -4936,7 +4936,7 @@
             </a:pPr>
             <a:r>
               <a:rPr/>
-              <a:t>01/03/2026</a:t>
+              <a:t>08/03/2026</a:t>
             </a:r>
           </a:p>
         </p:txBody>

--- a/materials/PMM-M1/PMM-M1-S1-Constructive-Alignment/PMM-M1-S1-Constructive-Alignment-slides.pptx
+++ b/materials/PMM-M1/PMM-M1-S1-Constructive-Alignment/PMM-M1-S1-Constructive-Alignment-slides.pptx
@@ -4936,7 +4936,7 @@
             </a:pPr>
             <a:r>
               <a:rPr/>
-              <a:t>08/03/2026</a:t>
+              <a:t>11/03/2026</a:t>
             </a:r>
           </a:p>
         </p:txBody>

--- a/materials/PMM-M1/PMM-M1-S1-Constructive-Alignment/PMM-M1-S1-Constructive-Alignment-slides.pptx
+++ b/materials/PMM-M1/PMM-M1-S1-Constructive-Alignment/PMM-M1-S1-Constructive-Alignment-slides.pptx
@@ -4936,7 +4936,7 @@
             </a:pPr>
             <a:r>
               <a:rPr/>
-              <a:t>11/03/2026</a:t>
+              <a:t>15/03/2026</a:t>
             </a:r>
           </a:p>
         </p:txBody>

--- a/materials/PMM-M1/PMM-M1-S1-Constructive-Alignment/PMM-M1-S1-Constructive-Alignment-slides.pptx
+++ b/materials/PMM-M1/PMM-M1-S1-Constructive-Alignment/PMM-M1-S1-Constructive-Alignment-slides.pptx
@@ -4907,8 +4907,6 @@
             <a:pPr lvl="0" indent="0" marL="0">
               <a:buNone/>
             </a:pPr>
-            <a:br/>
-            <a:br/>
             <a:r>
               <a:rPr/>
               <a:t>Sarah von Grebmer</a:t>
@@ -4936,7 +4934,7 @@
             </a:pPr>
             <a:r>
               <a:rPr/>
-              <a:t>15/03/2026</a:t>
+              <a:t>22/03/2026</a:t>
             </a:r>
           </a:p>
         </p:txBody>

--- a/materials/PMM-M1/PMM-M1-S1-Constructive-Alignment/PMM-M1-S1-Constructive-Alignment-slides.pptx
+++ b/materials/PMM-M1/PMM-M1-S1-Constructive-Alignment/PMM-M1-S1-Constructive-Alignment-slides.pptx
@@ -4934,7 +4934,7 @@
             </a:pPr>
             <a:r>
               <a:rPr/>
-              <a:t>22/03/2026</a:t>
+              <a:t>29/03/2026</a:t>
             </a:r>
           </a:p>
         </p:txBody>

--- a/materials/PMM-M1/PMM-M1-S1-Constructive-Alignment/PMM-M1-S1-Constructive-Alignment-slides.pptx
+++ b/materials/PMM-M1/PMM-M1-S1-Constructive-Alignment/PMM-M1-S1-Constructive-Alignment-slides.pptx
@@ -4934,7 +4934,7 @@
             </a:pPr>
             <a:r>
               <a:rPr/>
-              <a:t>29/03/2026</a:t>
+              <a:t>05/04/2026</a:t>
             </a:r>
           </a:p>
         </p:txBody>

--- a/materials/PMM-M1/PMM-M1-S1-Constructive-Alignment/PMM-M1-S1-Constructive-Alignment-slides.pptx
+++ b/materials/PMM-M1/PMM-M1-S1-Constructive-Alignment/PMM-M1-S1-Constructive-Alignment-slides.pptx
@@ -4934,7 +4934,7 @@
             </a:pPr>
             <a:r>
               <a:rPr/>
-              <a:t>05/04/2026</a:t>
+              <a:t>12/04/2026</a:t>
             </a:r>
           </a:p>
         </p:txBody>

--- a/materials/PMM-M1/PMM-M1-S1-Constructive-Alignment/PMM-M1-S1-Constructive-Alignment-slides.pptx
+++ b/materials/PMM-M1/PMM-M1-S1-Constructive-Alignment/PMM-M1-S1-Constructive-Alignment-slides.pptx
@@ -4934,7 +4934,7 @@
             </a:pPr>
             <a:r>
               <a:rPr/>
-              <a:t>12/04/2026</a:t>
+              <a:t>03/05/2026</a:t>
             </a:r>
           </a:p>
         </p:txBody>

--- a/materials/PMM-M1/PMM-M1-S1-Constructive-Alignment/PMM-M1-S1-Constructive-Alignment-slides.pptx
+++ b/materials/PMM-M1/PMM-M1-S1-Constructive-Alignment/PMM-M1-S1-Constructive-Alignment-slides.pptx
@@ -4934,7 +4934,7 @@
             </a:pPr>
             <a:r>
               <a:rPr/>
-              <a:t>03/05/2026</a:t>
+              <a:t>10/05/2026</a:t>
             </a:r>
           </a:p>
         </p:txBody>

--- a/materials/PMM-M1/PMM-M1-S1-Constructive-Alignment/PMM-M1-S1-Constructive-Alignment-slides.pptx
+++ b/materials/PMM-M1/PMM-M1-S1-Constructive-Alignment/PMM-M1-S1-Constructive-Alignment-slides.pptx
@@ -4934,7 +4934,7 @@
             </a:pPr>
             <a:r>
               <a:rPr/>
-              <a:t>10/05/2026</a:t>
+              <a:t>12/05/2026</a:t>
             </a:r>
           </a:p>
         </p:txBody>
